--- a/presentation/Project_Kavach_SIH.pptx
+++ b/presentation/Project_Kavach_SIH.pptx
@@ -3108,8 +3108,8 @@
         </p:nvSpPr>
         <p:spPr>
           <a:xfrm>
-            <a:off x="731520" y="548640"/>
-            <a:ext cx="10698480" cy="1645920"/>
+            <a:off x="731520" y="274320"/>
+            <a:ext cx="10698480" cy="1188720"/>
           </a:xfrm>
           <a:prstGeom prst="rect">
             <a:avLst/>
@@ -3123,7 +3123,7 @@
           <a:lstStyle/>
           <a:p>
             <a:pPr>
-              <a:defRPr sz="3800" b="1">
+              <a:defRPr sz="3200" b="1">
                 <a:solidFill>
                   <a:srgbClr val="06B6D4"/>
                 </a:solidFill>
@@ -3131,12 +3131,12 @@
               </a:defRPr>
             </a:pPr>
             <a:r>
-              <a:t>PROJECT KAVACH</a:t>
+              <a:t>AUTONEX</a:t>
             </a:r>
           </a:p>
           <a:p>
             <a:pPr>
-              <a:defRPr sz="2200" b="1">
+              <a:defRPr sz="1600" b="1">
                 <a:solidFill>
                   <a:srgbClr val="FFFFFF"/>
                 </a:solidFill>
@@ -3144,12 +3144,12 @@
               </a:defRPr>
             </a:pPr>
             <a:r>
-              <a:t>AI-Driven Dynamic Railway Traffic &amp; Delay Management System</a:t>
+              <a:t>Dynamic Forecast of Expected Time of Arrival (ETA) &amp; Safety Management for Coaching Trains</a:t>
             </a:r>
           </a:p>
           <a:p>
             <a:pPr>
-              <a:defRPr sz="1300">
+              <a:defRPr sz="1100">
                 <a:solidFill>
                   <a:srgbClr val="A0AEC0"/>
                 </a:solidFill>
@@ -3157,7 +3157,7 @@
               </a:defRPr>
             </a:pPr>
             <a:r>
-              <a:t>Smart India Hackathon (SIH) | Intelligent Indian Railways Scheduling &amp; Safety Solution</a:t>
+              <a:t>Smart India Hackathon (SIH) | Intelligent Multi-Sensor Traffic, Safety &amp; Maintenance System</a:t>
             </a:r>
           </a:p>
         </p:txBody>
@@ -3170,8 +3170,8 @@
         </p:nvSpPr>
         <p:spPr>
           <a:xfrm>
-            <a:off x="731520" y="2377440"/>
-            <a:ext cx="10728655" cy="3931920"/>
+            <a:off x="731520" y="1554480"/>
+            <a:ext cx="10728655" cy="2011680"/>
           </a:xfrm>
           <a:prstGeom prst="roundRect">
             <a:avLst/>
@@ -3181,7 +3181,7 @@
           </a:solidFill>
           <a:ln w="19050">
             <a:solidFill>
-              <a:srgbClr val="28416E"/>
+              <a:srgbClr val="F59E0B"/>
             </a:solidFill>
           </a:ln>
         </p:spPr>
@@ -3200,11 +3200,11 @@
           </a:fontRef>
         </p:style>
         <p:txBody>
-          <a:bodyPr rtlCol="0" anchor="ctr" wrap="square" tIns="274320" lIns="365760" rIns="365760"/>
+          <a:bodyPr rtlCol="0" anchor="ctr" wrap="square" tIns="137160" lIns="274320" rIns="274320"/>
           <a:lstStyle/>
           <a:p>
             <a:pPr algn="ctr">
-              <a:defRPr sz="1600" b="1">
+              <a:defRPr sz="1100" b="1">
                 <a:solidFill>
                   <a:srgbClr val="F59E0B"/>
                 </a:solidFill>
@@ -3212,17 +3212,118 @@
               </a:defRPr>
             </a:pPr>
             <a:r>
-              <a:t>PROBLEM STATEMENT: RAILWAY DELAY &amp; FREIGHT BOTTLENECK LOSSES</a:t>
+              <a:t>PROBLEM STATEMENT: STUDENT INNOVATION TECHNOLOGY IDEAS IN TERTIARY SECTORS LIKE HOSPITALITY, FINANCIAL SERVICES, ENTERTAINMENT AND RETAILS</a:t>
             </a:r>
           </a:p>
           <a:p>
             <a:pPr>
               <a:spcBef>
-                <a:spcPts val="1000"/>
+                <a:spcPts val="300"/>
               </a:spcBef>
             </a:pPr>
             <a:r>
-              <a:rPr b="1" sz="1400">
+              <a:rPr b="1" sz="1050">
+                <a:solidFill>
+                  <a:srgbClr val="FFFFFF"/>
+                </a:solidFill>
+              </a:rPr>
+              <a:t>•  Cross-Sector Innovation Transfer:</a:t>
+            </a:r>
+            <a:r>
+              <a:rPr sz="1050">
+                <a:solidFill>
+                  <a:srgbClr val="A0AEC0"/>
+                </a:solidFill>
+              </a:rPr>
+              <a:t> Translating advanced data analytics, sensor telemetry, dynamic forecasting, and automated queue/resource management from tertiary service sectors into heavy railway transport logistics.</a:t>
+            </a:r>
+          </a:p>
+          <a:p>
+            <a:pPr>
+              <a:spcBef>
+                <a:spcPts val="300"/>
+              </a:spcBef>
+            </a:pPr>
+            <a:r>
+              <a:rPr b="1" sz="1050">
+                <a:solidFill>
+                  <a:srgbClr val="FFFFFF"/>
+                </a:solidFill>
+              </a:rPr>
+              <a:t>•  Operational Friction &amp; Delays:</a:t>
+            </a:r>
+            <a:r>
+              <a:rPr sz="1050">
+                <a:solidFill>
+                  <a:srgbClr val="A0AEC0"/>
+                </a:solidFill>
+              </a:rPr>
+              <a:t> Traditional transport management suffers from reactive decision-making, manual communication latency, and lack of real-time predictive visibility across complex service networks.</a:t>
+            </a:r>
+          </a:p>
+        </p:txBody>
+      </p:sp>
+      <p:sp>
+        <p:nvSpPr>
+          <p:cNvPr id="4" name="Rounded Rectangle 3"/>
+          <p:cNvSpPr/>
+          <p:nvPr/>
+        </p:nvSpPr>
+        <p:spPr>
+          <a:xfrm>
+            <a:off x="731520" y="3749039"/>
+            <a:ext cx="10728655" cy="2743200"/>
+          </a:xfrm>
+          <a:prstGeom prst="roundRect">
+            <a:avLst/>
+          </a:prstGeom>
+          <a:solidFill>
+            <a:srgbClr val="172544"/>
+          </a:solidFill>
+          <a:ln w="19050">
+            <a:solidFill>
+              <a:srgbClr val="06B6D4"/>
+            </a:solidFill>
+          </a:ln>
+        </p:spPr>
+        <p:style>
+          <a:lnRef idx="1">
+            <a:schemeClr val="accent1"/>
+          </a:lnRef>
+          <a:fillRef idx="3">
+            <a:schemeClr val="accent1"/>
+          </a:fillRef>
+          <a:effectRef idx="2">
+            <a:schemeClr val="accent1"/>
+          </a:effectRef>
+          <a:fontRef idx="minor">
+            <a:schemeClr val="lt1"/>
+          </a:fontRef>
+        </p:style>
+        <p:txBody>
+          <a:bodyPr rtlCol="0" anchor="ctr" wrap="square" tIns="137160" lIns="274320" rIns="274320"/>
+          <a:lstStyle/>
+          <a:p>
+            <a:pPr algn="ctr">
+              <a:defRPr sz="1200" b="1">
+                <a:solidFill>
+                  <a:srgbClr val="06B6D4"/>
+                </a:solidFill>
+                <a:latin typeface="Calibri"/>
+              </a:defRPr>
+            </a:pPr>
+            <a:r>
+              <a:t>OBJECTIVE: RAILWAY TRAFFIC BOTTLENECK ELIMINATION, MULTI-SENSOR INTEGRATION &amp; ETA FORECAST</a:t>
+            </a:r>
+          </a:p>
+          <a:p>
+            <a:pPr>
+              <a:spcBef>
+                <a:spcPts val="300"/>
+              </a:spcBef>
+            </a:pPr>
+            <a:r>
+              <a:rPr b="1" sz="1050">
                 <a:solidFill>
                   <a:srgbClr val="FFFFFF"/>
                 </a:solidFill>
@@ -3230,81 +3331,81 @@
               <a:t>•  Cascading Network Delays:</a:t>
             </a:r>
             <a:r>
-              <a:rPr sz="1400">
+              <a:rPr sz="1050">
                 <a:solidFill>
                   <a:srgbClr val="A0AEC0"/>
                 </a:solidFill>
               </a:rPr>
-              <a:t> When a freight train (maal gadi) or local passenger train gets delayed, it blocks high-priority express/superfast trains running behind it, wrecking the entire timetable schedule.</a:t>
+              <a:t> Freight trains (maal gadi) choke express corridors, causing massive cascading delay propagation for high-priority coaching trains.</a:t>
             </a:r>
           </a:p>
           <a:p>
             <a:pPr>
               <a:spcBef>
-                <a:spcPts val="1000"/>
+                <a:spcPts val="300"/>
               </a:spcBef>
             </a:pPr>
             <a:r>
-              <a:rPr b="1" sz="1400">
+              <a:rPr b="1" sz="1050">
                 <a:solidFill>
                   <a:srgbClr val="FFFFFF"/>
                 </a:solidFill>
               </a:rPr>
-              <a:t>•  Massive Economic Losses:</a:t>
-            </a:r>
-            <a:r>
-              <a:rPr sz="1400">
+              <a:t>•  Multi-Sensor Integration (Speed, Safety &amp; Track Health):</a:t>
+            </a:r>
+            <a:r>
+              <a:rPr sz="1050">
                 <a:solidFill>
                   <a:srgbClr val="A0AEC0"/>
                 </a:solidFill>
               </a:rPr>
-              <a:t> Indian Railways faces huge operational expenses, fuel wastage, penalty charges, and reduced track throughput due to unmanaged bottleneck delays.</a:t>
+              <a:t> Deploying wheel tachometers and axle counter sensors for live train speed tracking, proximity/brake sensors for safety management, and trackside strain &amp; vibration sensors for predictive track maintenance.</a:t>
             </a:r>
           </a:p>
           <a:p>
             <a:pPr>
               <a:spcBef>
-                <a:spcPts val="1000"/>
+                <a:spcPts val="300"/>
               </a:spcBef>
             </a:pPr>
             <a:r>
-              <a:rPr b="1" sz="1400">
+              <a:rPr b="1" sz="1050">
                 <a:solidFill>
                   <a:srgbClr val="FFFFFF"/>
                 </a:solidFill>
               </a:rPr>
-              <a:t>•  Lack of Predictive Overtake Logic:</a:t>
-            </a:r>
-            <a:r>
-              <a:rPr sz="1400">
+              <a:t>•  Pre-emptive Overtake &amp; Halt Optimization:</a:t>
+            </a:r>
+            <a:r>
+              <a:rPr sz="1050">
                 <a:solidFill>
                   <a:srgbClr val="A0AEC0"/>
                 </a:solidFill>
               </a:rPr>
-              <a:t> Traditional manual dispatching delays decisions until trains reach congested signals, causing sudden stops and prolonged idling.</a:t>
+              <a:t> Detecting speed deltas and distance gaps 20-30 minutes in advance to shunt freight trains into loop lines smoothly with zero collision risk.</a:t>
             </a:r>
           </a:p>
           <a:p>
             <a:pPr>
               <a:spcBef>
-                <a:spcPts val="1000"/>
+                <a:spcPts val="300"/>
               </a:spcBef>
             </a:pPr>
             <a:r>
-              <a:rPr b="1" sz="1400">
+              <a:rPr b="1" sz="1050">
                 <a:solidFill>
                   <a:srgbClr val="FFFFFF"/>
                 </a:solidFill>
               </a:rPr>
-              <a:t>•  Safety vs. Speed Dilemma:</a:t>
-            </a:r>
-            <a:r>
-              <a:rPr sz="1400">
+              <a:t>•  Dynamic Live ETA Readout:</a:t>
+            </a:r>
+            <a:r>
+              <a:rPr sz="1050">
                 <a:solidFill>
                   <a:srgbClr val="A0AEC0"/>
                 </a:solidFill>
               </a:rPr>
-              <a:t> Speeding up delayed trains manually without high-precision live gap monitoring increases risk of signal passed at danger (SPAD) and collisions.</a:t>
+              <a:t> Delivering sub-second accurate ETA updates to Station Master signaling consoles and passenger screens, eliminating financial and fuel losses.</a:t>
             </a:r>
           </a:p>
         </p:txBody>
@@ -3343,7 +3444,7 @@
         </p:nvSpPr>
         <p:spPr>
           <a:xfrm>
-            <a:off x="731520" y="365760"/>
+            <a:off x="731520" y="320040"/>
             <a:ext cx="10698480" cy="365760"/>
           </a:xfrm>
           <a:prstGeom prst="rect">
@@ -3379,7 +3480,7 @@
         </p:nvSpPr>
         <p:spPr>
           <a:xfrm>
-            <a:off x="731520" y="640080"/>
+            <a:off x="731520" y="594360"/>
             <a:ext cx="10698480" cy="731520"/>
           </a:xfrm>
           <a:prstGeom prst="rect">
@@ -3394,7 +3495,7 @@
           <a:lstStyle/>
           <a:p>
             <a:pPr>
-              <a:defRPr sz="2600" b="1">
+              <a:defRPr sz="2400" b="1">
                 <a:solidFill>
                   <a:srgbClr val="FFFFFF"/>
                 </a:solidFill>
@@ -3402,7 +3503,7 @@
               </a:defRPr>
             </a:pPr>
             <a:r>
-              <a:t>Core Architecture: Real-Time Distance &amp; Delay Monitoring Screen</a:t>
+              <a:t>AUTONEX Multi-Sensor Engine: Real-Time Speed, Safety &amp; Track Maintenance</a:t>
             </a:r>
           </a:p>
         </p:txBody>
@@ -3449,7 +3550,7 @@
           <a:lstStyle/>
           <a:p>
             <a:pPr algn="ctr">
-              <a:defRPr sz="1500" b="1">
+              <a:defRPr sz="1400" b="1">
                 <a:solidFill>
                   <a:srgbClr val="06B6D4"/>
                 </a:solidFill>
@@ -3457,7 +3558,7 @@
               </a:defRPr>
             </a:pPr>
             <a:r>
-              <a:t>1. Dynamic Distance &amp; Location Tracking</a:t>
+              <a:t>1. Train Speed &amp; Telemetry Sensors</a:t>
             </a:r>
           </a:p>
           <a:p>
@@ -3465,7 +3566,7 @@
               <a:spcBef>
                 <a:spcPts val="1400"/>
               </a:spcBef>
-              <a:defRPr sz="1300">
+              <a:defRPr sz="1200">
                 <a:solidFill>
                   <a:srgbClr val="FFFFFF"/>
                 </a:solidFill>
@@ -3473,15 +3574,15 @@
               </a:defRPr>
             </a:pPr>
             <a:r>
-              <a:t>• Continuous GPS + RFID Trackside Telemetry.</a:t>
+              <a:t>• Live Speed Tracking: Wheel tachometers and axle counters capture real-time train speed and acceleration profiles.</a:t>
             </a:r>
             <a:br/>
             <a:r>
-              <a:t>• Calculates exact gap (in meters) between preceding and trailing trains in real-time.</a:t>
+              <a:t>• GPS + Trackside RFID Telemetry: Calculates exact gap (in meters) between preceding and trailing trains in real-time.</a:t>
             </a:r>
             <a:br/>
             <a:r>
-              <a:t>• Provides fail-safe anti-collision distance boundary enforcement.</a:t>
+              <a:t>• Fail-Safe Anti-Collision: Enforces dynamic braking curves based on speed sensor data.</a:t>
             </a:r>
           </a:p>
         </p:txBody>
@@ -3528,7 +3629,7 @@
           <a:lstStyle/>
           <a:p>
             <a:pPr algn="ctr">
-              <a:defRPr sz="1500" b="1">
+              <a:defRPr sz="1400" b="1">
                 <a:solidFill>
                   <a:srgbClr val="10B981"/>
                 </a:solidFill>
@@ -3536,7 +3637,7 @@
               </a:defRPr>
             </a:pPr>
             <a:r>
-              <a:t>2. Live Delay Analytics Dashboard</a:t>
+              <a:t>2. Track Maintenance &amp; Safety Sensors</a:t>
             </a:r>
           </a:p>
           <a:p>
@@ -3544,7 +3645,7 @@
               <a:spcBef>
                 <a:spcPts val="1400"/>
               </a:spcBef>
-              <a:defRPr sz="1300">
+              <a:defRPr sz="1200">
                 <a:solidFill>
                   <a:srgbClr val="FFFFFF"/>
                 </a:solidFill>
@@ -3552,15 +3653,15 @@
               </a:defRPr>
             </a:pPr>
             <a:r>
-              <a:t>• Real-time accurate delay readout displayed directly on controller &amp; loco-pilot screen.</a:t>
+              <a:t>• Track Performance Sensors: Strain gauges and vibration accelerometers monitor rail stress, load distribution, and ballast stability.</a:t>
             </a:r>
             <a:br/>
             <a:r>
-              <a:t>• Instant calculation of exact lost time (e.g. +18 min delay).</a:t>
+              <a:t>• Preventive Maintenance Alerts: Automatically flags track wear &amp; deformation before failures occur.</a:t>
             </a:r>
             <a:br/>
             <a:r>
-              <a:t>• Eliminates manual estimation and communication latency.</a:t>
+              <a:t>• Trackside Thermal &amp; Structural Sensors: Monitors rail temperature expansion to prevent track buckling.</a:t>
             </a:r>
           </a:p>
         </p:txBody>
@@ -3607,7 +3708,7 @@
           <a:lstStyle/>
           <a:p>
             <a:pPr algn="ctr">
-              <a:defRPr sz="1500" b="1">
+              <a:defRPr sz="1400" b="1">
                 <a:solidFill>
                   <a:srgbClr val="F59E0B"/>
                 </a:solidFill>
@@ -3615,7 +3716,7 @@
               </a:defRPr>
             </a:pPr>
             <a:r>
-              <a:t>3. Automated Signal &amp; Traffic Advisory</a:t>
+              <a:t>3. Live Accurate ETA &amp; Signal Advisory</a:t>
             </a:r>
           </a:p>
           <a:p>
@@ -3623,7 +3724,7 @@
               <a:spcBef>
                 <a:spcPts val="1400"/>
               </a:spcBef>
-              <a:defRPr sz="1300">
+              <a:defRPr sz="1200">
                 <a:solidFill>
                   <a:srgbClr val="FFFFFF"/>
                 </a:solidFill>
@@ -3631,15 +3732,15 @@
               </a:defRPr>
             </a:pPr>
             <a:r>
-              <a:t>• AI-driven algorithm recommends optimal speed profiles.</a:t>
+              <a:t>• Dynamic Forecast Readout: Instant calculation of Expected Time of Arrival (ETA) displayed live on station screens (+18 min delay recovery).</a:t>
             </a:r>
             <a:br/>
             <a:r>
-              <a:t>• Predicts potential bottlenecks 30-40 km in advance.</a:t>
+              <a:t>• AI Traffic Optimization: Recommends optimal speed recovery profiles 30-40 km in advance.</a:t>
             </a:r>
             <a:br/>
             <a:r>
-              <a:t>• Automatically coordinates with station master signaling terminals.</a:t>
+              <a:t>• Station Master Signal Sync: Seamless interlock with station signaling terminals.</a:t>
             </a:r>
           </a:p>
         </p:txBody>
@@ -3678,7 +3779,7 @@
         </p:nvSpPr>
         <p:spPr>
           <a:xfrm>
-            <a:off x="731520" y="365760"/>
+            <a:off x="731520" y="320040"/>
             <a:ext cx="10698480" cy="365760"/>
           </a:xfrm>
           <a:prstGeom prst="rect">
@@ -3714,7 +3815,7 @@
         </p:nvSpPr>
         <p:spPr>
           <a:xfrm>
-            <a:off x="731520" y="640080"/>
+            <a:off x="731520" y="594360"/>
             <a:ext cx="10698480" cy="731520"/>
           </a:xfrm>
           <a:prstGeom prst="rect">
@@ -3729,7 +3830,7 @@
           <a:lstStyle/>
           <a:p>
             <a:pPr>
-              <a:defRPr sz="2600" b="1">
+              <a:defRPr sz="2400" b="1">
                 <a:solidFill>
                   <a:srgbClr val="FFFFFF"/>
                 </a:solidFill>
@@ -3737,7 +3838,7 @@
               </a:defRPr>
             </a:pPr>
             <a:r>
-              <a:t>Scenario 1: Dynamic Speed Recovery &amp; Safe Distance Control</a:t>
+              <a:t>Scenario 1: Dynamic Speed Recovery, Sensor Safety &amp; Distance Control</a:t>
             </a:r>
           </a:p>
         </p:txBody>
@@ -3780,51 +3881,74 @@
           </a:fontRef>
         </p:style>
         <p:txBody>
-          <a:bodyPr rtlCol="0" anchor="ctr" wrap="square" tIns="274320" lIns="365760" rIns="365760"/>
+          <a:bodyPr rtlCol="0" anchor="ctr" wrap="square" tIns="274320" lIns="365760"/>
           <a:lstStyle/>
           <a:p>
             <a:pPr algn="ctr">
-              <a:defRPr sz="1600" b="1">
+              <a:defRPr sz="1400" b="1">
                 <a:solidFill>
                   <a:srgbClr val="06B6D4"/>
                 </a:solidFill>
               </a:defRPr>
             </a:pPr>
             <a:r>
-              <a:t>OPTIMIZED SPEED BOOST WITH ZERO COLLISION RISK</a:t>
+              <a:t>SPEED BOOST WITH MULTI-SENSOR SAFETY MANAGEMENT</a:t>
             </a:r>
           </a:p>
           <a:p>
             <a:pPr>
               <a:spcBef>
-                <a:spcPts val="1000"/>
+                <a:spcPts val="800"/>
               </a:spcBef>
             </a:pPr>
             <a:r>
-              <a:rPr b="1" sz="1300">
+              <a:rPr b="1" sz="1200">
                 <a:solidFill>
                   <a:srgbClr val="FFFFFF"/>
                 </a:solidFill>
               </a:rPr>
-              <a:t>• Trailing Train Speed Optimization:</a:t>
-            </a:r>
-            <a:r>
-              <a:rPr sz="1300">
+              <a:t>• Speed Sensor Telemetry:</a:t>
+            </a:r>
+            <a:r>
+              <a:rPr sz="1200">
                 <a:solidFill>
                   <a:srgbClr val="A0AEC0"/>
                 </a:solidFill>
               </a:rPr>
-              <a:t> If a trailing train is running behind schedule, the system automatically evaluates section limits and permits safe speed acceleration.</a:t>
+              <a:t> Speed sensors (wheel tachometers &amp; axle counters) continuously monitor train speed to ensure permissible section limit acceleration.</a:t>
             </a:r>
           </a:p>
           <a:p>
             <a:pPr>
               <a:spcBef>
-                <a:spcPts val="1000"/>
+                <a:spcPts val="800"/>
               </a:spcBef>
             </a:pPr>
             <a:r>
-              <a:rPr b="1" sz="1300">
+              <a:rPr b="1" sz="1200">
+                <a:solidFill>
+                  <a:srgbClr val="FFFFFF"/>
+                </a:solidFill>
+              </a:rPr>
+              <a:t>• Track Performance Validation:</a:t>
+            </a:r>
+            <a:r>
+              <a:rPr sz="1200">
+                <a:solidFill>
+                  <a:srgbClr val="A0AEC0"/>
+                </a:solidFill>
+              </a:rPr>
+              <a:t> Track strain and vibration sensors confirm track health stability before permitting speed recovery.</a:t>
+            </a:r>
+          </a:p>
+          <a:p>
+            <a:pPr>
+              <a:spcBef>
+                <a:spcPts val="800"/>
+              </a:spcBef>
+            </a:pPr>
+            <a:r>
+              <a:rPr b="1" sz="1200">
                 <a:solidFill>
                   <a:srgbClr val="FFFFFF"/>
                 </a:solidFill>
@@ -3832,22 +3956,22 @@
               <a:t>• Real-Time Inter-Train Gap Guard:</a:t>
             </a:r>
             <a:r>
-              <a:rPr sz="1300">
+              <a:rPr sz="1200">
                 <a:solidFill>
                   <a:srgbClr val="A0AEC0"/>
                 </a:solidFill>
               </a:rPr>
-              <a:t> Location data of both preceding and trailing trains is streamed synchronously to maintain mandatory safe braking distance.</a:t>
+              <a:t> Telemetry data of preceding and trailing trains streams synchronously to maintain mandatory safe braking distance.</a:t>
             </a:r>
           </a:p>
           <a:p>
             <a:pPr>
               <a:spcBef>
-                <a:spcPts val="1000"/>
+                <a:spcPts val="800"/>
               </a:spcBef>
             </a:pPr>
             <a:r>
-              <a:rPr b="1" sz="1300">
+              <a:rPr b="1" sz="1200">
                 <a:solidFill>
                   <a:srgbClr val="FFFFFF"/>
                 </a:solidFill>
@@ -3855,35 +3979,12 @@
               <a:t>• Collision Prevention Assurance:</a:t>
             </a:r>
             <a:r>
-              <a:rPr sz="1300">
+              <a:rPr sz="1200">
                 <a:solidFill>
                   <a:srgbClr val="A0AEC0"/>
                 </a:solidFill>
               </a:rPr>
-              <a:t> If the gap narrows below safe threshold, the engine automatically throttles back or applies controlled braking.</a:t>
-            </a:r>
-          </a:p>
-          <a:p>
-            <a:pPr>
-              <a:spcBef>
-                <a:spcPts val="1000"/>
-              </a:spcBef>
-            </a:pPr>
-            <a:r>
-              <a:rPr b="1" sz="1300">
-                <a:solidFill>
-                  <a:srgbClr val="FFFFFF"/>
-                </a:solidFill>
-              </a:rPr>
-              <a:t>• Delay Mitigation:</a:t>
-            </a:r>
-            <a:r>
-              <a:rPr sz="1300">
-                <a:solidFill>
-                  <a:srgbClr val="A0AEC0"/>
-                </a:solidFill>
-              </a:rPr>
-              <a:t> Allows late trains to make up lost minutes dynamically on clear tracks without risking safety hazards.</a:t>
+              <a:t> If inter-train gap narrows below safe threshold, the system automatically throttles back or applies controlled braking.</a:t>
             </a:r>
           </a:p>
         </p:txBody>
@@ -3930,47 +4031,93 @@
           <a:lstStyle/>
           <a:p>
             <a:pPr algn="ctr">
-              <a:defRPr sz="1600" b="1">
+              <a:defRPr sz="1500" b="1">
                 <a:solidFill>
                   <a:srgbClr val="10B981"/>
                 </a:solidFill>
               </a:defRPr>
             </a:pPr>
             <a:r>
-              <a:t>SAFETY DISTANCE MATRIX</a:t>
+              <a:t>AUTONEX SENSOR &amp; SAFETY MATRIX</a:t>
             </a:r>
           </a:p>
           <a:p>
             <a:pPr>
               <a:spcBef>
-                <a:spcPts val="1400"/>
+                <a:spcPts val="1000"/>
               </a:spcBef>
             </a:pPr>
             <a:r>
-              <a:rPr b="1" sz="1300">
+              <a:rPr b="1" sz="1200">
                 <a:solidFill>
                   <a:srgbClr val="FFFFFF"/>
                 </a:solidFill>
               </a:rPr>
-              <a:t>Location Telemetry:</a:t>
-            </a:r>
-            <a:r>
-              <a:rPr sz="1300">
+              <a:t>Speed Telemetry:</a:t>
+            </a:r>
+            <a:r>
+              <a:rPr sz="1200">
                 <a:solidFill>
                   <a:srgbClr val="06B6D4"/>
                 </a:solidFill>
               </a:rPr>
-              <a:t> GPS + Trackside Transponders</a:t>
+              <a:t> Wheel Tachometers + Axle Counters</a:t>
             </a:r>
           </a:p>
           <a:p>
             <a:pPr>
               <a:spcBef>
-                <a:spcPts val="1400"/>
+                <a:spcPts val="1000"/>
               </a:spcBef>
             </a:pPr>
             <a:r>
-              <a:rPr b="1" sz="1300">
+              <a:rPr b="1" sz="1200">
+                <a:solidFill>
+                  <a:srgbClr val="FFFFFF"/>
+                </a:solidFill>
+              </a:rPr>
+              <a:t>Track Maintenance:</a:t>
+            </a:r>
+            <a:r>
+              <a:rPr sz="1200">
+                <a:solidFill>
+                  <a:srgbClr val="06B6D4"/>
+                </a:solidFill>
+              </a:rPr>
+              <a:t> Strain Gauges + Vibration Sensors</a:t>
+            </a:r>
+          </a:p>
+          <a:p>
+            <a:pPr>
+              <a:spcBef>
+                <a:spcPts val="1000"/>
+              </a:spcBef>
+            </a:pPr>
+            <a:r>
+              <a:rPr b="1" sz="1200">
+                <a:solidFill>
+                  <a:srgbClr val="FFFFFF"/>
+                </a:solidFill>
+              </a:rPr>
+              <a:t>Location Tracking:</a:t>
+            </a:r>
+            <a:r>
+              <a:rPr sz="1200">
+                <a:solidFill>
+                  <a:srgbClr val="06B6D4"/>
+                </a:solidFill>
+              </a:rPr>
+              <a:t> GPS + Trackside RFID Transponders</a:t>
+            </a:r>
+          </a:p>
+          <a:p>
+            <a:pPr>
+              <a:spcBef>
+                <a:spcPts val="1000"/>
+              </a:spcBef>
+            </a:pPr>
+            <a:r>
+              <a:rPr b="1" sz="1200">
                 <a:solidFill>
                   <a:srgbClr val="FFFFFF"/>
                 </a:solidFill>
@@ -3978,7 +4125,7 @@
               <a:t>Gap Calculation:</a:t>
             </a:r>
             <a:r>
-              <a:rPr sz="1300">
+              <a:rPr sz="1200">
                 <a:solidFill>
                   <a:srgbClr val="06B6D4"/>
                 </a:solidFill>
@@ -3989,57 +4136,34 @@
           <a:p>
             <a:pPr>
               <a:spcBef>
-                <a:spcPts val="1400"/>
+                <a:spcPts val="1000"/>
               </a:spcBef>
             </a:pPr>
             <a:r>
-              <a:rPr b="1" sz="1300">
+              <a:rPr b="1" sz="1200">
                 <a:solidFill>
                   <a:srgbClr val="FFFFFF"/>
                 </a:solidFill>
               </a:rPr>
-              <a:t>Speed Curve:</a:t>
-            </a:r>
-            <a:r>
-              <a:rPr sz="1300">
+              <a:t>ETA Forecast Model:</a:t>
+            </a:r>
+            <a:r>
+              <a:rPr sz="1200">
                 <a:solidFill>
                   <a:srgbClr val="06B6D4"/>
                 </a:solidFill>
               </a:rPr>
-              <a:t> AI Braking Curve Calculation</a:t>
+              <a:t> Dynamic Live Delay Adjustment</a:t>
             </a:r>
           </a:p>
           <a:p>
             <a:pPr>
               <a:spcBef>
-                <a:spcPts val="1400"/>
+                <a:spcPts val="1000"/>
               </a:spcBef>
             </a:pPr>
             <a:r>
-              <a:rPr b="1" sz="1300">
-                <a:solidFill>
-                  <a:srgbClr val="FFFFFF"/>
-                </a:solidFill>
-              </a:rPr>
-              <a:t>Max Gap Buffer:</a:t>
-            </a:r>
-            <a:r>
-              <a:rPr sz="1300">
-                <a:solidFill>
-                  <a:srgbClr val="06B6D4"/>
-                </a:solidFill>
-              </a:rPr>
-              <a:t> Adaptive Based on Train Weight &amp; Speed</a:t>
-            </a:r>
-          </a:p>
-          <a:p>
-            <a:pPr>
-              <a:spcBef>
-                <a:spcPts val="1400"/>
-              </a:spcBef>
-            </a:pPr>
-            <a:r>
-              <a:rPr b="1" sz="1300">
+              <a:rPr b="1" sz="1200">
                 <a:solidFill>
                   <a:srgbClr val="FFFFFF"/>
                 </a:solidFill>
@@ -4047,12 +4171,12 @@
               <a:t>Collision Risk:</a:t>
             </a:r>
             <a:r>
-              <a:rPr sz="1300">
+              <a:rPr sz="1200">
                 <a:solidFill>
                   <a:srgbClr val="06B6D4"/>
                 </a:solidFill>
               </a:rPr>
-              <a:t> 0% (Fail-Safe Signal Interlock)</a:t>
+              <a:t> 0% (Fail-Safe Sensor Interlock)</a:t>
             </a:r>
           </a:p>
         </p:txBody>
@@ -4091,7 +4215,7 @@
         </p:nvSpPr>
         <p:spPr>
           <a:xfrm>
-            <a:off x="731520" y="365760"/>
+            <a:off x="731520" y="320040"/>
             <a:ext cx="10698480" cy="365760"/>
           </a:xfrm>
           <a:prstGeom prst="rect">
@@ -4127,7 +4251,7 @@
         </p:nvSpPr>
         <p:spPr>
           <a:xfrm>
-            <a:off x="731520" y="640080"/>
+            <a:off x="731520" y="594360"/>
             <a:ext cx="10698480" cy="731520"/>
           </a:xfrm>
           <a:prstGeom prst="rect">
@@ -4142,7 +4266,7 @@
           <a:lstStyle/>
           <a:p>
             <a:pPr>
-              <a:defRPr sz="2600" b="1">
+              <a:defRPr sz="2400" b="1">
                 <a:solidFill>
                   <a:srgbClr val="FFFFFF"/>
                 </a:solidFill>
@@ -4197,7 +4321,7 @@
           <a:lstStyle/>
           <a:p>
             <a:pPr algn="ctr">
-              <a:defRPr sz="1500" b="1">
+              <a:defRPr sz="1400" b="1">
                 <a:solidFill>
                   <a:srgbClr val="10B981"/>
                 </a:solidFill>
@@ -4212,14 +4336,14 @@
               <a:spcBef>
                 <a:spcPts val="600"/>
               </a:spcBef>
-              <a:defRPr sz="1300">
+              <a:defRPr sz="1200">
                 <a:solidFill>
                   <a:srgbClr val="FFFFFF"/>
                 </a:solidFill>
               </a:defRPr>
             </a:pPr>
             <a:r>
-              <a:t>• Early Detection: When a Superfast Express approaches from behind a slower Freight/Local train, the system detects distance gap 20-30 minutes in advance.</a:t>
+              <a:t>• Speed &amp; Distance Gap Detection: When a Coaching train approaches a slower Freight train, AUTONEX speed sensors and gap telemetry detect closing distance 20–30 minutes in advance.</a:t>
             </a:r>
           </a:p>
           <a:p>
@@ -4227,14 +4351,14 @@
               <a:spcBef>
                 <a:spcPts val="400"/>
               </a:spcBef>
-              <a:defRPr sz="1300">
+              <a:defRPr sz="1200">
                 <a:solidFill>
                   <a:srgbClr val="A0AEC0"/>
                 </a:solidFill>
               </a:defRPr>
             </a:pPr>
             <a:r>
-              <a:t>• Seamless Shunting: The slower train is pre-routed into a loop line ahead of time without forcing abrupt braking, letting the Superfast train pass effortlessly.</a:t>
+              <a:t>• Seamless Shunting: The slower freight train is pre-routed into a loop line smoothly ahead of time, allowing the coaching train to overtake effortlessly without abrupt stopping.</a:t>
             </a:r>
           </a:p>
         </p:txBody>
@@ -4281,7 +4405,7 @@
           <a:lstStyle/>
           <a:p>
             <a:pPr algn="ctr">
-              <a:defRPr sz="1500" b="1">
+              <a:defRPr sz="1400" b="1">
                 <a:solidFill>
                   <a:srgbClr val="06B6D4"/>
                 </a:solidFill>
@@ -4296,14 +4420,14 @@
               <a:spcBef>
                 <a:spcPts val="600"/>
               </a:spcBef>
-              <a:defRPr sz="1300">
+              <a:defRPr sz="1200">
                 <a:solidFill>
                   <a:srgbClr val="FFFFFF"/>
                 </a:solidFill>
               </a:defRPr>
             </a:pPr>
             <a:r>
-              <a:t>• Smart Station Halt Selection: If stopping a train at a current small station will choke the section, the system shifts its operational halt to the next station.</a:t>
+              <a:t>• Smart Station Halt Selection: If stopping a train at a congested station will choke section throughput, AUTONEX dynamically shifts operational halts to the next available station.</a:t>
             </a:r>
           </a:p>
           <a:p>
@@ -4311,14 +4435,14 @@
               <a:spcBef>
                 <a:spcPts val="400"/>
               </a:spcBef>
-              <a:defRPr sz="1300">
+              <a:defRPr sz="1200">
                 <a:solidFill>
                   <a:srgbClr val="A0AEC0"/>
                 </a:solidFill>
               </a:defRPr>
             </a:pPr>
             <a:r>
-              <a:t>• Accurate Delay Screen: Exact delay time and updated schedule are shown live on controller dashboard screens with zero error.</a:t>
+              <a:t>• Real-Time Controller Sync: Updated ETA schedules and track status are broadcast live to station master signaling screens.</a:t>
             </a:r>
           </a:p>
         </p:txBody>
@@ -4357,7 +4481,7 @@
         </p:nvSpPr>
         <p:spPr>
           <a:xfrm>
-            <a:off x="731520" y="365760"/>
+            <a:off x="731520" y="320040"/>
             <a:ext cx="10698480" cy="365760"/>
           </a:xfrm>
           <a:prstGeom prst="rect">
@@ -4393,7 +4517,7 @@
         </p:nvSpPr>
         <p:spPr>
           <a:xfrm>
-            <a:off x="731520" y="640080"/>
+            <a:off x="731520" y="594360"/>
             <a:ext cx="10698480" cy="731520"/>
           </a:xfrm>
           <a:prstGeom prst="rect">
@@ -4408,7 +4532,7 @@
           <a:lstStyle/>
           <a:p>
             <a:pPr>
-              <a:defRPr sz="2600" b="1">
+              <a:defRPr sz="2400" b="1">
                 <a:solidFill>
                   <a:srgbClr val="FFFFFF"/>
                 </a:solidFill>
@@ -4463,7 +4587,7 @@
           <a:lstStyle/>
           <a:p>
             <a:pPr algn="ctr">
-              <a:defRPr sz="2800" b="1">
+              <a:defRPr sz="2400" b="1">
                 <a:solidFill>
                   <a:srgbClr val="10B981"/>
                 </a:solidFill>
@@ -4476,7 +4600,7 @@
           </a:p>
           <a:p>
             <a:pPr>
-              <a:defRPr sz="1300" b="1">
+              <a:defRPr sz="1200" b="1">
                 <a:solidFill>
                   <a:srgbClr val="FFFFFF"/>
                 </a:solidFill>
@@ -4489,7 +4613,7 @@
           </a:p>
           <a:p>
             <a:pPr>
-              <a:defRPr sz="1100">
+              <a:defRPr sz="1050">
                 <a:solidFill>
                   <a:srgbClr val="A0AEC0"/>
                 </a:solidFill>
@@ -4497,7 +4621,7 @@
               </a:defRPr>
             </a:pPr>
             <a:r>
-              <a:t>Guaranteed safe gap distance &amp; automated interlock</a:t>
+              <a:t>Fail-safe speed &amp; proximity sensor interlocks</a:t>
             </a:r>
           </a:p>
         </p:txBody>
@@ -4544,7 +4668,7 @@
           <a:lstStyle/>
           <a:p>
             <a:pPr algn="ctr">
-              <a:defRPr sz="2800" b="1">
+              <a:defRPr sz="2400" b="1">
                 <a:solidFill>
                   <a:srgbClr val="06B6D4"/>
                 </a:solidFill>
@@ -4557,7 +4681,7 @@
           </a:p>
           <a:p>
             <a:pPr>
-              <a:defRPr sz="1300" b="1">
+              <a:defRPr sz="1200" b="1">
                 <a:solidFill>
                   <a:srgbClr val="FFFFFF"/>
                 </a:solidFill>
@@ -4570,7 +4694,7 @@
           </a:p>
           <a:p>
             <a:pPr>
-              <a:defRPr sz="1100">
+              <a:defRPr sz="1050">
                 <a:solidFill>
                   <a:srgbClr val="A0AEC0"/>
                 </a:solidFill>
@@ -4578,7 +4702,7 @@
               </a:defRPr>
             </a:pPr>
             <a:r>
-              <a:t>Eliminating bottleneck propagation &amp; freight idling</a:t>
+              <a:t>Eliminating cascading bottleneck delays</a:t>
             </a:r>
           </a:p>
         </p:txBody>
@@ -4625,7 +4749,7 @@
           <a:lstStyle/>
           <a:p>
             <a:pPr algn="ctr">
-              <a:defRPr sz="2800" b="1">
+              <a:defRPr sz="2400" b="1">
                 <a:solidFill>
                   <a:srgbClr val="F59E0B"/>
                 </a:solidFill>
@@ -4633,12 +4757,12 @@
               </a:defRPr>
             </a:pPr>
             <a:r>
-              <a:t>20-30 Min</a:t>
+              <a:t>Predictive</a:t>
             </a:r>
           </a:p>
           <a:p>
             <a:pPr>
-              <a:defRPr sz="1300" b="1">
+              <a:defRPr sz="1200" b="1">
                 <a:solidFill>
                   <a:srgbClr val="FFFFFF"/>
                 </a:solidFill>
@@ -4646,12 +4770,12 @@
               </a:defRPr>
             </a:pPr>
             <a:r>
-              <a:t>Advance Loop Pre-routing</a:t>
+              <a:t>Track Maintenance</a:t>
             </a:r>
           </a:p>
           <a:p>
             <a:pPr>
-              <a:defRPr sz="1100">
+              <a:defRPr sz="1050">
                 <a:solidFill>
                   <a:srgbClr val="A0AEC0"/>
                 </a:solidFill>
@@ -4659,7 +4783,7 @@
               </a:defRPr>
             </a:pPr>
             <a:r>
-              <a:t>Smooth overtake for Superfast trains without delays</a:t>
+              <a:t>Track strain &amp; vibration sensor telemetry</a:t>
             </a:r>
           </a:p>
         </p:txBody>
@@ -4706,7 +4830,7 @@
           <a:lstStyle/>
           <a:p>
             <a:pPr algn="ctr">
-              <a:defRPr sz="2800" b="1">
+              <a:defRPr sz="2400" b="1">
                 <a:solidFill>
                   <a:srgbClr val="FFFFFF"/>
                 </a:solidFill>
@@ -4719,7 +4843,7 @@
           </a:p>
           <a:p>
             <a:pPr>
-              <a:defRPr sz="1300" b="1">
+              <a:defRPr sz="1200" b="1">
                 <a:solidFill>
                   <a:srgbClr val="FFFFFF"/>
                 </a:solidFill>
@@ -4732,7 +4856,7 @@
           </a:p>
           <a:p>
             <a:pPr>
-              <a:defRPr sz="1100">
+              <a:defRPr sz="1050">
                 <a:solidFill>
                   <a:srgbClr val="A0AEC0"/>
                 </a:solidFill>
@@ -4740,7 +4864,7 @@
               </a:defRPr>
             </a:pPr>
             <a:r>
-              <a:t>Real-time delay &amp; location gap telemetry on screen</a:t>
+              <a:t>Real-time location, speed &amp; ETA on screen</a:t>
             </a:r>
           </a:p>
         </p:txBody>
@@ -4787,14 +4911,14 @@
           <a:lstStyle/>
           <a:p>
             <a:pPr algn="ctr">
-              <a:defRPr sz="1500" b="1">
+              <a:defRPr sz="1400" b="1">
                 <a:solidFill>
                   <a:srgbClr val="06B6D4"/>
                 </a:solidFill>
               </a:defRPr>
             </a:pPr>
             <a:r>
-              <a:t>WHY THIS SYSTEM IS A GAME-CHANGER FOR SIH &amp; INDIAN RAILWAYS</a:t>
+              <a:t>WHY AUTONEX IS A GAME-CHANGER FOR SIH &amp; INDIAN RAILWAYS</a:t>
             </a:r>
           </a:p>
           <a:p>
@@ -4802,14 +4926,14 @@
               <a:spcBef>
                 <a:spcPts val="400"/>
               </a:spcBef>
-              <a:defRPr sz="1300">
+              <a:defRPr sz="1200">
                 <a:solidFill>
                   <a:srgbClr val="FFFFFF"/>
                 </a:solidFill>
               </a:defRPr>
             </a:pPr>
             <a:r>
-              <a:t>1. Fail-Safe Operations: Integrates dynamic distance gap tracking so higher speed recovery never leads to collision danger.</a:t>
+              <a:t>1. Dynamic ETA Forecasting: Accurate live ETA predictions dynamically updated via multi-sensor telemetry.</a:t>
             </a:r>
           </a:p>
           <a:p>
@@ -4817,14 +4941,14 @@
               <a:spcBef>
                 <a:spcPts val="400"/>
               </a:spcBef>
-              <a:defRPr sz="1300">
+              <a:defRPr sz="1200">
                 <a:solidFill>
                   <a:srgbClr val="FFFFFF"/>
                 </a:solidFill>
               </a:defRPr>
             </a:pPr>
             <a:r>
-              <a:t>2. Maximized Track Capacity: Moves freight &amp; local trains to loop lines 20-30 mins prior, ensuring high-speed corridors stay unlocked.</a:t>
+              <a:t>2. Multi-Sensor Safety Management: Speed sensors, proximity tracking, and track health monitoring ensure 0% collision and derailment risk.</a:t>
             </a:r>
           </a:p>
           <a:p>
@@ -4832,14 +4956,14 @@
               <a:spcBef>
                 <a:spcPts val="400"/>
               </a:spcBef>
-              <a:defRPr sz="1300">
+              <a:defRPr sz="1200">
                 <a:solidFill>
                   <a:srgbClr val="FFFFFF"/>
                 </a:solidFill>
               </a:defRPr>
             </a:pPr>
             <a:r>
-              <a:t>3. Precise Live Controller Display: Shows exact train locations, inter-train distance gaps, and accurate live delay metrics on screen.</a:t>
+              <a:t>3. Predictive Track Maintenance: Continuous trackside sensor telemetry detects rail strain &amp; ballast wear to prevent unscheduled track failures.</a:t>
             </a:r>
           </a:p>
           <a:p>
@@ -4847,14 +4971,14 @@
               <a:spcBef>
                 <a:spcPts val="400"/>
               </a:spcBef>
-              <a:defRPr sz="1300">
+              <a:defRPr sz="1200">
                 <a:solidFill>
                   <a:srgbClr val="FFFFFF"/>
                 </a:solidFill>
               </a:defRPr>
             </a:pPr>
             <a:r>
-              <a:t>4. Scalable &amp; Cost-Effective: Can be deployed on top of existing Kavach signaling hardware with intelligent software automation.</a:t>
+              <a:t>4. Optimized Section Capacity: Pre-emptively shunts slow freight trains to loop lines 20-30 mins prior, keeping high-speed corridors unlocked.</a:t>
             </a:r>
           </a:p>
         </p:txBody>
